--- a/DesafioML.pptx
+++ b/DesafioML.pptx
@@ -143,6 +143,7 @@
 <file path=ppt/revisionInfo.xml><?xml version="1.0" encoding="utf-8"?>
 <p1510:revInfo xmlns:a="http://schemas.openxmlformats.org/drawingml/2006/main" xmlns:r="http://schemas.openxmlformats.org/officeDocument/2006/relationships" xmlns:p1510="http://schemas.microsoft.com/office/powerpoint/2015/10/main">
   <p1510:revLst>
+    <p1510:client id="{36D027F0-F8C6-4864-B231-E9034F4335C2}" v="139" dt="2024-05-09T00:35:18.644"/>
     <p1510:client id="{766D3A66-7CC6-45B8-AEE0-777ABC9C96FE}" v="8089" dt="2024-05-08T23:34:54.372"/>
     <p1510:client id="{87BAF674-D373-4FFF-9DF6-542C54B4DC6F}" v="3" dt="2024-05-08T23:54:53.239"/>
   </p1510:revLst>
@@ -172,6 +173,46 @@
             <ac:spMk id="3" creationId="{8EF1D440-F066-C84F-A66F-CD8C5668B7C5}"/>
           </ac:spMkLst>
         </pc:spChg>
+      </pc:sldChg>
+    </pc:docChg>
+  </pc:docChgLst>
+  <pc:docChgLst>
+    <pc:chgData name="Marcelo Moraes Cardozo" userId="edc4260feab78faa" providerId="Windows Live" clId="Web-{36D027F0-F8C6-4864-B231-E9034F4335C2}"/>
+    <pc:docChg chg="modSld">
+      <pc:chgData name="Marcelo Moraes Cardozo" userId="edc4260feab78faa" providerId="Windows Live" clId="Web-{36D027F0-F8C6-4864-B231-E9034F4335C2}" dt="2024-05-09T00:35:18.644" v="73" actId="1076"/>
+      <pc:docMkLst>
+        <pc:docMk/>
+      </pc:docMkLst>
+      <pc:sldChg chg="addSp delSp modSp">
+        <pc:chgData name="Marcelo Moraes Cardozo" userId="edc4260feab78faa" providerId="Windows Live" clId="Web-{36D027F0-F8C6-4864-B231-E9034F4335C2}" dt="2024-05-09T00:35:18.644" v="73" actId="1076"/>
+        <pc:sldMkLst>
+          <pc:docMk/>
+          <pc:sldMk cId="272343331" sldId="285"/>
+        </pc:sldMkLst>
+        <pc:spChg chg="mod">
+          <ac:chgData name="Marcelo Moraes Cardozo" userId="edc4260feab78faa" providerId="Windows Live" clId="Web-{36D027F0-F8C6-4864-B231-E9034F4335C2}" dt="2024-05-09T00:35:11.815" v="72" actId="20577"/>
+          <ac:spMkLst>
+            <pc:docMk/>
+            <pc:sldMk cId="272343331" sldId="285"/>
+            <ac:spMk id="4" creationId="{0281464E-F3A5-CFA2-CADF-A0C7778F975C}"/>
+          </ac:spMkLst>
+        </pc:spChg>
+        <pc:picChg chg="del">
+          <ac:chgData name="Marcelo Moraes Cardozo" userId="edc4260feab78faa" providerId="Windows Live" clId="Web-{36D027F0-F8C6-4864-B231-E9034F4335C2}" dt="2024-05-09T00:32:06.465" v="2"/>
+          <ac:picMkLst>
+            <pc:docMk/>
+            <pc:sldMk cId="272343331" sldId="285"/>
+            <ac:picMk id="3" creationId="{88ECAE49-3DB3-C07F-C877-B0411A89C0FB}"/>
+          </ac:picMkLst>
+        </pc:picChg>
+        <pc:picChg chg="add mod">
+          <ac:chgData name="Marcelo Moraes Cardozo" userId="edc4260feab78faa" providerId="Windows Live" clId="Web-{36D027F0-F8C6-4864-B231-E9034F4335C2}" dt="2024-05-09T00:35:18.644" v="73" actId="1076"/>
+          <ac:picMkLst>
+            <pc:docMk/>
+            <pc:sldMk cId="272343331" sldId="285"/>
+            <ac:picMk id="5" creationId="{44E8D99D-4933-41C1-C491-8C8D00BE9A54}"/>
+          </ac:picMkLst>
+        </pc:picChg>
       </pc:sldChg>
     </pc:docChg>
   </pc:docChgLst>
@@ -6786,36 +6827,6 @@
           </a:p>
         </p:txBody>
       </p:sp>
-      <p:pic>
-        <p:nvPicPr>
-          <p:cNvPr id="3" name="Imagem 2" descr="Tela de celular com fundo preto&#10;&#10;Descrição gerada automaticamente">
-            <a:extLst>
-              <a:ext uri="{FF2B5EF4-FFF2-40B4-BE49-F238E27FC236}">
-                <a16:creationId xmlns:a16="http://schemas.microsoft.com/office/drawing/2014/main" id="{88ECAE49-3DB3-C07F-C877-B0411A89C0FB}"/>
-              </a:ext>
-            </a:extLst>
-          </p:cNvPr>
-          <p:cNvPicPr>
-            <a:picLocks noChangeAspect="1"/>
-          </p:cNvPicPr>
-          <p:nvPr/>
-        </p:nvPicPr>
-        <p:blipFill>
-          <a:blip r:embed="rId2"/>
-          <a:stretch>
-            <a:fillRect/>
-          </a:stretch>
-        </p:blipFill>
-        <p:spPr>
-          <a:xfrm>
-            <a:off x="2028092" y="1866980"/>
-            <a:ext cx="8135817" cy="4331518"/>
-          </a:xfrm>
-          <a:prstGeom prst="rect">
-            <a:avLst/>
-          </a:prstGeom>
-        </p:spPr>
-      </p:pic>
       <p:sp>
         <p:nvSpPr>
           <p:cNvPr id="4" name="CaixaDeTexto 3">
@@ -6831,7 +6842,7 @@
         <p:spPr>
           <a:xfrm>
             <a:off x="574431" y="715108"/>
-            <a:ext cx="11043138" cy="1015663"/>
+            <a:ext cx="11043138" cy="784830"/>
           </a:xfrm>
           <a:prstGeom prst="rect">
             <a:avLst/>
@@ -6858,7 +6869,7 @@
             </a:r>
             <a:r>
               <a:rPr lang="pt-BR" sz="1500" dirty="0"/>
-              <a:t> de 2 </a:t>
+              <a:t> de 1000req/min e 16 </a:t>
             </a:r>
             <a:r>
               <a:rPr lang="pt-BR" sz="1500" dirty="0" err="1"/>
@@ -6866,7 +6877,7 @@
             </a:r>
             <a:r>
               <a:rPr lang="pt-BR" sz="1500" dirty="0"/>
-              <a:t>/min, após as duas requisições com sucesso, o tráfego passa a ser limitado, retornando o código "429 – Too </a:t>
+              <a:t>/s, após um tempo recebendo status 200, de requisições com sucesso, o tráfego passa a ser limitado, retornando o código "429 – Too </a:t>
             </a:r>
             <a:r>
               <a:rPr lang="pt-BR" sz="1500" dirty="0" err="1"/>
@@ -6882,28 +6893,41 @@
             </a:r>
             <a:r>
               <a:rPr lang="pt-BR" sz="1500" dirty="0"/>
-              <a:t>".  Essa configuração pode ser alterada rapidamente para atender ao requisito de 1000req/s. Não foi possível a demonstração via </a:t>
-            </a:r>
-            <a:r>
-              <a:rPr lang="pt-BR" sz="1500" dirty="0" err="1"/>
-              <a:t>Datadog</a:t>
-            </a:r>
-            <a:r>
-              <a:rPr lang="pt-BR" sz="1500" dirty="0"/>
-              <a:t> pois não foi possível a integração com a </a:t>
-            </a:r>
-            <a:r>
-              <a:rPr lang="pt-BR" sz="1500" dirty="0" err="1"/>
-              <a:t>stack</a:t>
-            </a:r>
-            <a:r>
-              <a:rPr lang="pt-BR" sz="1500" dirty="0"/>
-              <a:t> do Kong. </a:t>
-            </a:r>
-            <a:endParaRPr lang="pt-BR" dirty="0"/>
+              <a:t>", demonstrando que as requisições foram barradas. </a:t>
+            </a:r>
           </a:p>
         </p:txBody>
       </p:sp>
+      <p:pic>
+        <p:nvPicPr>
+          <p:cNvPr id="5" name="Imagem 4" descr="Tela de celular com aplicativo aberto&#10;&#10;Descrição gerada automaticamente">
+            <a:extLst>
+              <a:ext uri="{FF2B5EF4-FFF2-40B4-BE49-F238E27FC236}">
+                <a16:creationId xmlns:a16="http://schemas.microsoft.com/office/drawing/2014/main" id="{44E8D99D-4933-41C1-C491-8C8D00BE9A54}"/>
+              </a:ext>
+            </a:extLst>
+          </p:cNvPr>
+          <p:cNvPicPr>
+            <a:picLocks noChangeAspect="1"/>
+          </p:cNvPicPr>
+          <p:nvPr/>
+        </p:nvPicPr>
+        <p:blipFill>
+          <a:blip r:embed="rId2"/>
+          <a:stretch>
+            <a:fillRect/>
+          </a:stretch>
+        </p:blipFill>
+        <p:spPr>
+          <a:xfrm>
+            <a:off x="1277816" y="1708849"/>
+            <a:ext cx="9624646" cy="4272639"/>
+          </a:xfrm>
+          <a:prstGeom prst="rect">
+            <a:avLst/>
+          </a:prstGeom>
+        </p:spPr>
+      </p:pic>
     </p:spTree>
     <p:extLst>
       <p:ext uri="{BB962C8B-B14F-4D97-AF65-F5344CB8AC3E}">
